--- a/docs/submission/ClauseCatcher.pptx
+++ b/docs/submission/ClauseCatcher.pptx
@@ -1845,6 +1845,10 @@
             <a:prstDash val="solid"/>
           </a:ln>
         </p:spPr>
+        <p:txBody>
+          <a:bodyPr/>
+          <a:p/>
+        </p:txBody>
       </p:sp>
       <p:sp>
         <p:nvSpPr>
@@ -1911,6 +1915,10 @@
             <a:prstDash val="solid"/>
           </a:ln>
         </p:spPr>
+        <p:txBody>
+          <a:bodyPr/>
+          <a:p/>
+        </p:txBody>
       </p:sp>
       <p:sp>
         <p:nvSpPr>
@@ -2023,6 +2031,10 @@
             </a:outerShdw>
           </a:effectLst>
         </p:spPr>
+        <p:txBody>
+          <a:bodyPr/>
+          <a:p/>
+        </p:txBody>
       </p:sp>
       <p:pic>
         <p:nvPicPr>
@@ -2191,6 +2203,10 @@
             </a:outerShdw>
           </a:effectLst>
         </p:spPr>
+        <p:txBody>
+          <a:bodyPr/>
+          <a:p/>
+        </p:txBody>
       </p:sp>
       <p:sp>
         <p:nvSpPr>
@@ -2255,6 +2271,10 @@
             <a:prstDash val="solid"/>
           </a:ln>
         </p:spPr>
+        <p:txBody>
+          <a:bodyPr/>
+          <a:p/>
+        </p:txBody>
       </p:sp>
       <p:sp>
         <p:nvSpPr>
@@ -2319,6 +2339,10 @@
             <a:prstDash val="solid"/>
           </a:ln>
         </p:spPr>
+        <p:txBody>
+          <a:bodyPr/>
+          <a:p/>
+        </p:txBody>
       </p:sp>
       <p:sp>
         <p:nvSpPr>
@@ -2383,6 +2407,10 @@
             <a:prstDash val="solid"/>
           </a:ln>
         </p:spPr>
+        <p:txBody>
+          <a:bodyPr/>
+          <a:p/>
+        </p:txBody>
       </p:sp>
       <p:sp>
         <p:nvSpPr>
@@ -2417,7 +2445,7 @@
                 <a:ea typeface="Arial" pitchFamily="34" charset="-122"/>
                 <a:cs typeface="Arial" pitchFamily="34" charset="-120"/>
               </a:rPr>
-              <a:t>~$0.12 API usage per demo call</a:t>
+              <a:t>$0.08–$0.15 API usage per call</a:t>
             </a:r>
             <a:endParaRPr lang="en-US" sz="1800" dirty="0"/>
           </a:p>
@@ -2456,6 +2484,10 @@
             </a:outerShdw>
           </a:effectLst>
         </p:spPr>
+        <p:txBody>
+          <a:bodyPr/>
+          <a:p/>
+        </p:txBody>
       </p:sp>
       <p:sp>
         <p:nvSpPr>
@@ -2520,6 +2552,10 @@
             <a:prstDash val="solid"/>
           </a:ln>
         </p:spPr>
+        <p:txBody>
+          <a:bodyPr/>
+          <a:p/>
+        </p:txBody>
       </p:sp>
       <p:sp>
         <p:nvSpPr>
@@ -2584,6 +2620,10 @@
             <a:prstDash val="solid"/>
           </a:ln>
         </p:spPr>
+        <p:txBody>
+          <a:bodyPr/>
+          <a:p/>
+        </p:txBody>
       </p:sp>
       <p:sp>
         <p:nvSpPr>
@@ -2648,6 +2688,10 @@
             <a:prstDash val="solid"/>
           </a:ln>
         </p:spPr>
+        <p:txBody>
+          <a:bodyPr/>
+          <a:p/>
+        </p:txBody>
       </p:sp>
       <p:sp>
         <p:nvSpPr>
@@ -2965,6 +3009,10 @@
             </a:outerShdw>
           </a:effectLst>
         </p:spPr>
+        <p:txBody>
+          <a:bodyPr/>
+          <a:p/>
+        </p:txBody>
       </p:sp>
       <p:sp>
         <p:nvSpPr>
@@ -3077,6 +3125,10 @@
             </a:outerShdw>
           </a:effectLst>
         </p:spPr>
+        <p:txBody>
+          <a:bodyPr/>
+          <a:p/>
+        </p:txBody>
       </p:sp>
       <p:sp>
         <p:nvSpPr>
@@ -3183,6 +3235,10 @@
             <a:prstDash val="solid"/>
           </a:ln>
         </p:spPr>
+        <p:txBody>
+          <a:bodyPr/>
+          <a:p/>
+        </p:txBody>
       </p:sp>
       <p:sp>
         <p:nvSpPr>
@@ -3286,6 +3342,10 @@
             <a:prstDash val="solid"/>
           </a:ln>
         </p:spPr>
+        <p:txBody>
+          <a:bodyPr/>
+          <a:p/>
+        </p:txBody>
       </p:sp>
       <p:sp>
         <p:nvSpPr>
@@ -3389,6 +3449,10 @@
             <a:prstDash val="solid"/>
           </a:ln>
         </p:spPr>
+        <p:txBody>
+          <a:bodyPr/>
+          <a:p/>
+        </p:txBody>
       </p:sp>
       <p:sp>
         <p:nvSpPr>
@@ -3650,6 +3714,10 @@
             </a:outerShdw>
           </a:effectLst>
         </p:spPr>
+        <p:txBody>
+          <a:bodyPr/>
+          <a:p/>
+        </p:txBody>
       </p:sp>
       <p:sp>
         <p:nvSpPr>
@@ -3882,6 +3950,10 @@
             </a:outerShdw>
           </a:effectLst>
         </p:spPr>
+        <p:txBody>
+          <a:bodyPr/>
+          <a:p/>
+        </p:txBody>
       </p:sp>
       <p:sp>
         <p:nvSpPr>
@@ -4114,6 +4186,10 @@
             </a:outerShdw>
           </a:effectLst>
         </p:spPr>
+        <p:txBody>
+          <a:bodyPr/>
+          <a:p/>
+        </p:txBody>
       </p:sp>
       <p:sp>
         <p:nvSpPr>
@@ -4490,6 +4566,10 @@
             <a:prstDash val="solid"/>
           </a:ln>
         </p:spPr>
+        <p:txBody>
+          <a:bodyPr/>
+          <a:p/>
+        </p:txBody>
       </p:sp>
       <p:sp>
         <p:nvSpPr>
@@ -4554,6 +4634,10 @@
             <a:prstDash val="solid"/>
           </a:ln>
         </p:spPr>
+        <p:txBody>
+          <a:bodyPr/>
+          <a:p/>
+        </p:txBody>
       </p:sp>
       <p:sp>
         <p:nvSpPr>
@@ -4588,7 +4672,7 @@
                 <a:ea typeface="Arial" pitchFamily="34" charset="-122"/>
                 <a:cs typeface="Arial" pitchFamily="34" charset="-120"/>
               </a:rPr>
-              <a:t>§3.1 flagged in ~2 s</a:t>
+              <a:t>§3.1 flagged in ~5 s</a:t>
             </a:r>
             <a:endParaRPr lang="en-US" sz="1500" dirty="0"/>
           </a:p>
@@ -4618,6 +4702,10 @@
             <a:prstDash val="solid"/>
           </a:ln>
         </p:spPr>
+        <p:txBody>
+          <a:bodyPr/>
+          <a:p/>
+        </p:txBody>
       </p:sp>
       <p:sp>
         <p:nvSpPr>
@@ -4682,6 +4770,10 @@
             <a:prstDash val="solid"/>
           </a:ln>
         </p:spPr>
+        <p:txBody>
+          <a:bodyPr/>
+          <a:p/>
+        </p:txBody>
       </p:sp>
       <p:sp>
         <p:nvSpPr>
@@ -4755,6 +4847,10 @@
             </a:outerShdw>
           </a:effectLst>
         </p:spPr>
+        <p:txBody>
+          <a:bodyPr/>
+          <a:p/>
+        </p:txBody>
       </p:sp>
       <p:pic>
         <p:nvPicPr>
@@ -4978,6 +5074,10 @@
             <a:prstDash val="solid"/>
           </a:ln>
         </p:spPr>
+        <p:txBody>
+          <a:bodyPr/>
+          <a:p/>
+        </p:txBody>
       </p:sp>
       <p:sp>
         <p:nvSpPr>
@@ -5122,6 +5222,10 @@
             <a:prstDash val="solid"/>
           </a:ln>
         </p:spPr>
+        <p:txBody>
+          <a:bodyPr/>
+          <a:p/>
+        </p:txBody>
       </p:sp>
       <p:sp>
         <p:nvSpPr>
@@ -5266,6 +5370,10 @@
             <a:prstDash val="solid"/>
           </a:ln>
         </p:spPr>
+        <p:txBody>
+          <a:bodyPr/>
+          <a:p/>
+        </p:txBody>
       </p:sp>
       <p:sp>
         <p:nvSpPr>
@@ -5417,6 +5525,10 @@
             </a:outerShdw>
           </a:effectLst>
         </p:spPr>
+        <p:txBody>
+          <a:bodyPr/>
+          <a:p/>
+        </p:txBody>
       </p:sp>
       <p:pic>
         <p:nvPicPr>
@@ -5624,6 +5736,10 @@
             </a:outerShdw>
           </a:effectLst>
         </p:spPr>
+        <p:txBody>
+          <a:bodyPr/>
+          <a:p/>
+        </p:txBody>
       </p:sp>
       <p:sp>
         <p:nvSpPr>
@@ -5775,6 +5891,10 @@
             </a:outerShdw>
           </a:effectLst>
         </p:spPr>
+        <p:txBody>
+          <a:bodyPr/>
+          <a:p/>
+        </p:txBody>
       </p:sp>
       <p:sp>
         <p:nvSpPr>
@@ -5965,6 +6085,10 @@
             </a:outerShdw>
           </a:effectLst>
         </p:spPr>
+        <p:txBody>
+          <a:bodyPr/>
+          <a:p/>
+        </p:txBody>
       </p:sp>
       <p:sp>
         <p:nvSpPr>
@@ -6116,6 +6240,10 @@
             </a:outerShdw>
           </a:effectLst>
         </p:spPr>
+        <p:txBody>
+          <a:bodyPr/>
+          <a:p/>
+        </p:txBody>
       </p:sp>
       <p:sp>
         <p:nvSpPr>
@@ -6267,6 +6395,10 @@
             </a:outerShdw>
           </a:effectLst>
         </p:spPr>
+        <p:txBody>
+          <a:bodyPr/>
+          <a:p/>
+        </p:txBody>
       </p:sp>
       <p:sp>
         <p:nvSpPr>
@@ -6450,6 +6582,10 @@
             <a:prstDash val="solid"/>
           </a:ln>
         </p:spPr>
+        <p:txBody>
+          <a:bodyPr/>
+          <a:p/>
+        </p:txBody>
       </p:sp>
       <p:sp>
         <p:nvSpPr>
@@ -6516,6 +6652,10 @@
             <a:prstDash val="solid"/>
           </a:ln>
         </p:spPr>
+        <p:txBody>
+          <a:bodyPr/>
+          <a:p/>
+        </p:txBody>
       </p:sp>
       <p:sp>
         <p:nvSpPr>
@@ -6752,6 +6892,10 @@
             </a:outerShdw>
           </a:effectLst>
         </p:spPr>
+        <p:txBody>
+          <a:bodyPr/>
+          <a:p/>
+        </p:txBody>
       </p:sp>
       <p:sp>
         <p:nvSpPr>
@@ -6981,6 +7125,10 @@
             </a:outerShdw>
           </a:effectLst>
         </p:spPr>
+        <p:txBody>
+          <a:bodyPr/>
+          <a:p/>
+        </p:txBody>
       </p:sp>
       <p:sp>
         <p:nvSpPr>
@@ -7203,6 +7351,10 @@
             <a:prstDash val="solid"/>
           </a:ln>
         </p:spPr>
+        <p:txBody>
+          <a:bodyPr/>
+          <a:p/>
+        </p:txBody>
       </p:sp>
       <p:sp>
         <p:nvSpPr>
@@ -7439,6 +7591,10 @@
             </a:outerShdw>
           </a:effectLst>
         </p:spPr>
+        <p:txBody>
+          <a:bodyPr/>
+          <a:p/>
+        </p:txBody>
       </p:sp>
       <p:sp>
         <p:nvSpPr>
@@ -7464,6 +7620,10 @@
             <a:prstDash val="solid"/>
           </a:ln>
         </p:spPr>
+        <p:txBody>
+          <a:bodyPr/>
+          <a:p/>
+        </p:txBody>
       </p:sp>
       <p:sp>
         <p:nvSpPr>
@@ -7618,6 +7778,10 @@
             </a:outerShdw>
           </a:effectLst>
         </p:spPr>
+        <p:txBody>
+          <a:bodyPr/>
+          <a:p/>
+        </p:txBody>
       </p:sp>
       <p:sp>
         <p:nvSpPr>
@@ -7643,6 +7807,10 @@
             <a:prstDash val="solid"/>
           </a:ln>
         </p:spPr>
+        <p:txBody>
+          <a:bodyPr/>
+          <a:p/>
+        </p:txBody>
       </p:sp>
       <p:sp>
         <p:nvSpPr>
@@ -7797,6 +7965,10 @@
             </a:outerShdw>
           </a:effectLst>
         </p:spPr>
+        <p:txBody>
+          <a:bodyPr/>
+          <a:p/>
+        </p:txBody>
       </p:sp>
       <p:sp>
         <p:nvSpPr>
@@ -7822,6 +7994,10 @@
             <a:prstDash val="solid"/>
           </a:ln>
         </p:spPr>
+        <p:txBody>
+          <a:bodyPr/>
+          <a:p/>
+        </p:txBody>
       </p:sp>
       <p:sp>
         <p:nvSpPr>
@@ -8125,7 +8301,7 @@
                 <a:ea typeface="Arial" pitchFamily="34" charset="-122"/>
                 <a:cs typeface="Arial" pitchFamily="34" charset="-120"/>
               </a:rPr>
-              <a:t>One live end-to-end run, real connections</a:t>
+              <a:t>Live end-to-end runs, real connections</a:t>
             </a:r>
             <a:endParaRPr lang="en-US" sz="3600" dirty="0"/>
           </a:p>
@@ -8164,6 +8340,10 @@
             </a:outerShdw>
           </a:effectLst>
         </p:spPr>
+        <p:txBody>
+          <a:bodyPr/>
+          <a:p/>
+        </p:txBody>
       </p:sp>
       <p:sp>
         <p:nvSpPr>
@@ -8198,7 +8378,7 @@
                 <a:ea typeface="Arial" pitchFamily="34" charset="-122"/>
                 <a:cs typeface="Arial" pitchFamily="34" charset="-120"/>
               </a:rPr>
-              <a:t>~2 s</a:t>
+              <a:t>~5 s</a:t>
             </a:r>
             <a:endParaRPr lang="en-US" sz="4000" dirty="0"/>
           </a:p>
@@ -8237,7 +8417,7 @@
                 <a:ea typeface="Arial" pitchFamily="34" charset="-122"/>
                 <a:cs typeface="Arial" pitchFamily="34" charset="-120"/>
               </a:rPr>
-              <a:t>sentence end to alert</a:t>
+              <a:t>sentence end to alert (4–6.5 s, five alerts)</a:t>
             </a:r>
             <a:endParaRPr lang="en-US" sz="1500" dirty="0"/>
           </a:p>
@@ -8276,6 +8456,10 @@
             </a:outerShdw>
           </a:effectLst>
         </p:spPr>
+        <p:txBody>
+          <a:bodyPr/>
+          <a:p/>
+        </p:txBody>
       </p:sp>
       <p:sp>
         <p:nvSpPr>
@@ -8349,7 +8533,7 @@
                 <a:ea typeface="Arial" pitchFamily="34" charset="-122"/>
                 <a:cs typeface="Arial" pitchFamily="34" charset="-120"/>
               </a:rPr>
-              <a:t>spoken vs. contract similarity</a:t>
+              <a:t>agent transcript vs. clause text</a:t>
             </a:r>
             <a:endParaRPr lang="en-US" sz="1500" dirty="0"/>
           </a:p>
@@ -8388,6 +8572,10 @@
             </a:outerShdw>
           </a:effectLst>
         </p:spPr>
+        <p:txBody>
+          <a:bodyPr/>
+          <a:p/>
+        </p:txBody>
       </p:sp>
       <p:sp>
         <p:nvSpPr>
@@ -8422,7 +8610,7 @@
                 <a:ea typeface="Arial" pitchFamily="34" charset="-122"/>
                 <a:cs typeface="Arial" pitchFamily="34" charset="-120"/>
               </a:rPr>
-              <a:t>~78 ms</a:t>
+              <a:t>~0.2 s</a:t>
             </a:r>
             <a:endParaRPr lang="en-US" sz="4000" dirty="0"/>
           </a:p>
@@ -8461,7 +8649,7 @@
                 <a:ea typeface="Arial" pitchFamily="34" charset="-122"/>
                 <a:cs typeface="Arial" pitchFamily="34" charset="-120"/>
               </a:rPr>
-              <a:t>speak request to first audio</a:t>
+              <a:t>speak request to first audio (78–890 ms)</a:t>
             </a:r>
             <a:endParaRPr lang="en-US" sz="1500" dirty="0"/>
           </a:p>
@@ -8500,6 +8688,10 @@
             </a:outerShdw>
           </a:effectLst>
         </p:spPr>
+        <p:txBody>
+          <a:bodyPr/>
+          <a:p/>
+        </p:txBody>
       </p:sp>
       <p:sp>
         <p:nvSpPr>
@@ -8534,7 +8726,7 @@
                 <a:ea typeface="Arial" pitchFamily="34" charset="-122"/>
                 <a:cs typeface="Arial" pitchFamily="34" charset="-120"/>
               </a:rPr>
-              <a:t>~$0.12</a:t>
+              <a:t>~$0.15</a:t>
             </a:r>
             <a:endParaRPr lang="en-US" sz="4000" dirty="0"/>
           </a:p>
@@ -8573,7 +8765,7 @@
                 <a:ea typeface="Arial" pitchFamily="34" charset="-122"/>
                 <a:cs typeface="Arial" pitchFamily="34" charset="-120"/>
               </a:rPr>
-              <a:t>API usage, full demo call</a:t>
+              <a:t>API usage, full call ($0.08–$0.15)</a:t>
             </a:r>
             <a:endParaRPr lang="en-US" sz="1500" dirty="0"/>
           </a:p>
@@ -8603,6 +8795,10 @@
             <a:prstDash val="solid"/>
           </a:ln>
         </p:spPr>
+        <p:txBody>
+          <a:bodyPr/>
+          <a:p/>
+        </p:txBody>
       </p:sp>
       <p:sp>
         <p:nvSpPr>
@@ -8667,6 +8863,10 @@
             <a:prstDash val="solid"/>
           </a:ln>
         </p:spPr>
+        <p:txBody>
+          <a:bodyPr/>
+          <a:p/>
+        </p:txBody>
       </p:sp>
       <p:sp>
         <p:nvSpPr>
@@ -8731,6 +8931,10 @@
             <a:prstDash val="solid"/>
           </a:ln>
         </p:spPr>
+        <p:txBody>
+          <a:bodyPr/>
+          <a:p/>
+        </p:txBody>
       </p:sp>
       <p:sp>
         <p:nvSpPr>
@@ -8765,7 +8969,7 @@
                 <a:ea typeface="Arial" pitchFamily="34" charset="-122"/>
                 <a:cs typeface="Arial" pitchFamily="34" charset="-120"/>
               </a:rPr>
-              <a:t>136 server tests passing</a:t>
+              <a:t>151 server tests passing</a:t>
             </a:r>
             <a:endParaRPr lang="en-US" sz="1700" dirty="0"/>
           </a:p>
@@ -8804,7 +9008,7 @@
                 <a:ea typeface="Arial" pitchFamily="34" charset="-122"/>
                 <a:cs typeface="Arial" pitchFamily="34" charset="-120"/>
               </a:rPr>
-              <a:t>Run of 2026-09-15: real AssemblyAI Streaming STT, Voice Agent and Gemini connections, scripted rep lines fed through the pipeline.</a:t>
+              <a:t>Runs of 2026-09-15 to 2026-09-17: real AssemblyAI Streaming STT, Voice Agent and Gemini connections, scripted rep lines fed through the pipeline.</a:t>
             </a:r>
             <a:endParaRPr lang="en-US" sz="1200" dirty="0"/>
           </a:p>

--- a/docs/submission/ClauseCatcher.pptx
+++ b/docs/submission/ClauseCatcher.pptx
@@ -14,6 +14,7 @@
     <p:sldId id="262" r:id="rId8"/>
     <p:sldId id="263" r:id="rId9"/>
     <p:sldId id="264" r:id="rId10"/>
+    <p:sldId id="266" r:id="rId17"/>
     <p:sldId id="265" r:id="rId11"/>
   </p:sldIdLst>
   <p:notesMasterIdLst>
@@ -2069,6 +2070,855 @@
 </file>
 
 <file path=ppt/slides/slide10.xml><?xml version="1.0" encoding="utf-8"?>
+<p:sld xmlns:a="http://schemas.openxmlformats.org/drawingml/2006/main" xmlns:p="http://schemas.openxmlformats.org/presentationml/2006/main" xmlns:r="http://schemas.openxmlformats.org/officeDocument/2006/relationships">
+  <p:cSld>
+    <p:bg>
+      <p:bgPr>
+        <a:solidFill>
+          <a:srgbClr val="0F172A"/>
+        </a:solidFill>
+      </p:bgPr>
+    </p:bg>
+    <p:spTree>
+      <p:nvGrpSpPr>
+        <p:cNvPr id="1" name=""/>
+        <p:cNvGrpSpPr/>
+        <p:nvPr/>
+      </p:nvGrpSpPr>
+      <p:grpSpPr/>
+      <p:sp>
+        <p:nvSpPr>
+          <p:cNvPr id="2" name="Text 0"/>
+          <p:cNvSpPr txBox="1"/>
+          <p:nvPr/>
+        </p:nvSpPr>
+        <p:spPr>
+          <a:xfrm>
+            <a:off x="548640" y="411480"/>
+            <a:ext cx="8229600" cy="274320"/>
+          </a:xfrm>
+          <a:prstGeom prst="rect">
+            <a:avLst/>
+          </a:prstGeom>
+          <a:noFill/>
+          <a:ln/>
+        </p:spPr>
+        <p:txBody>
+          <a:bodyPr wrap="square" lIns="0" tIns="0" rIns="0" bIns="0" rtlCol="0" anchor="t"/>
+          <a:lstStyle/>
+          <a:p>
+            <a:pPr indent="0" marL="0">
+              <a:buNone/>
+            </a:pPr>
+            <a:r>
+              <a:rPr lang="en-US" sz="1200" b="1" spc="200" kern="0" dirty="0">
+                <a:solidFill>
+                  <a:srgbClr val="22D3EE"/>
+                </a:solidFill>
+                <a:latin typeface="Consolas" pitchFamily="34" charset="0"/>
+                <a:ea typeface="Consolas" pitchFamily="34" charset="-122"/>
+                <a:cs typeface="Consolas" pitchFamily="34" charset="-120"/>
+              </a:rPr>
+              <a:t>THE MARKET, SIZED BOTTOM-UP</a:t>
+            </a:r>
+            <a:endParaRPr lang="en-US" sz="1200" dirty="0"/>
+          </a:p>
+        </p:txBody>
+      </p:sp>
+      <p:sp>
+        <p:nvSpPr>
+          <p:cNvPr id="3" name="Text 1"/>
+          <p:cNvSpPr txBox="1"/>
+          <p:nvPr/>
+        </p:nvSpPr>
+        <p:spPr>
+          <a:xfrm>
+            <a:off x="10271455" y="411480"/>
+            <a:ext cx="1371600" cy="274320"/>
+          </a:xfrm>
+          <a:prstGeom prst="rect">
+            <a:avLst/>
+          </a:prstGeom>
+          <a:noFill/>
+          <a:ln/>
+        </p:spPr>
+        <p:txBody>
+          <a:bodyPr wrap="square" lIns="0" tIns="0" rIns="0" bIns="0" rtlCol="0" anchor="t"/>
+          <a:lstStyle/>
+          <a:p>
+            <a:pPr algn="r" indent="0" marL="0">
+              <a:buNone/>
+            </a:pPr>
+            <a:r>
+              <a:rPr lang="en-US" sz="1100" dirty="0">
+                <a:solidFill>
+                  <a:srgbClr val="94A3B8"/>
+                </a:solidFill>
+                <a:latin typeface="Consolas" pitchFamily="34" charset="0"/>
+                <a:ea typeface="Consolas" pitchFamily="34" charset="-122"/>
+                <a:cs typeface="Consolas" pitchFamily="34" charset="-120"/>
+              </a:rPr>
+              <a:t>10 / 11</a:t>
+            </a:r>
+            <a:endParaRPr lang="en-US" sz="1100" dirty="0"/>
+          </a:p>
+        </p:txBody>
+      </p:sp>
+      <p:sp>
+        <p:nvSpPr>
+          <p:cNvPr id="4" name="Text 2"/>
+          <p:cNvSpPr txBox="1"/>
+          <p:nvPr/>
+        </p:nvSpPr>
+        <p:spPr>
+          <a:xfrm>
+            <a:off x="548640" y="777240"/>
+            <a:ext cx="11094415" cy="914400"/>
+          </a:xfrm>
+          <a:prstGeom prst="rect">
+            <a:avLst/>
+          </a:prstGeom>
+          <a:noFill/>
+          <a:ln/>
+        </p:spPr>
+        <p:txBody>
+          <a:bodyPr wrap="square" lIns="0" tIns="0" rIns="0" bIns="0" rtlCol="0" anchor="t"/>
+          <a:lstStyle/>
+          <a:p>
+            <a:pPr indent="0" marL="0">
+              <a:buNone/>
+            </a:pPr>
+            <a:r>
+              <a:rPr lang="en-US" sz="3600" b="1" dirty="0">
+                <a:solidFill>
+                  <a:srgbClr val="F8FAFC"/>
+                </a:solidFill>
+                <a:latin typeface="Arial" pitchFamily="34" charset="0"/>
+                <a:ea typeface="Arial" pitchFamily="34" charset="-122"/>
+                <a:cs typeface="Arial" pitchFamily="34" charset="-120"/>
+              </a:rPr>
+              <a:t>The category, and the slice we can name</a:t>
+            </a:r>
+            <a:endParaRPr lang="en-US" sz="3600" dirty="0"/>
+          </a:p>
+        </p:txBody>
+      </p:sp>
+      <p:sp>
+        <p:nvSpPr>
+          <p:cNvPr id="5" name="Shape 3"/>
+          <p:cNvSpPr/>
+          <p:nvPr/>
+        </p:nvSpPr>
+        <p:spPr>
+          <a:xfrm>
+            <a:off x="548640" y="2011680"/>
+            <a:ext cx="2567864" cy="2148840"/>
+          </a:xfrm>
+          <a:prstGeom prst="roundRect">
+            <a:avLst>
+              <a:gd name="adj" fmla="val 5957"/>
+            </a:avLst>
+          </a:prstGeom>
+          <a:solidFill>
+            <a:srgbClr val="1B2336"/>
+          </a:solidFill>
+          <a:ln w="12700">
+            <a:solidFill>
+              <a:srgbClr val="334155"/>
+            </a:solidFill>
+            <a:prstDash val="solid"/>
+          </a:ln>
+          <a:effectLst>
+            <a:outerShdw sx="100000" sy="100000" kx="0" ky="0" algn="bl" rotWithShape="0" blurRad="228600" dist="50800" dir="5400000">
+              <a:srgbClr val="000000">
+                <a:alpha val="35000"/>
+              </a:srgbClr>
+            </a:outerShdw>
+          </a:effectLst>
+        </p:spPr>
+        <p:txBody>
+          <a:bodyPr/>
+          <a:p/>
+        </p:txBody>
+      </p:sp>
+      <p:sp>
+        <p:nvSpPr>
+          <p:cNvPr id="6" name="Text 4"/>
+          <p:cNvSpPr txBox="1"/>
+          <p:nvPr/>
+        </p:nvSpPr>
+        <p:spPr>
+          <a:xfrm>
+            <a:off x="822960" y="2331720"/>
+            <a:ext cx="2156384" cy="1005840"/>
+          </a:xfrm>
+          <a:prstGeom prst="rect">
+            <a:avLst/>
+          </a:prstGeom>
+          <a:noFill/>
+          <a:ln/>
+        </p:spPr>
+        <p:txBody>
+          <a:bodyPr wrap="square" lIns="0" tIns="0" rIns="0" bIns="0" rtlCol="0" anchor="ctr"/>
+          <a:lstStyle/>
+          <a:p>
+            <a:pPr indent="0" marL="0">
+              <a:buNone/>
+            </a:pPr>
+            <a:r>
+              <a:rPr lang="en-US" sz="2800" b="1" dirty="0">
+                <a:solidFill>
+                  <a:srgbClr val="818CF8"/>
+                </a:solidFill>
+                <a:latin typeface="Arial" pitchFamily="34" charset="0"/>
+                <a:ea typeface="Arial" pitchFamily="34" charset="-122"/>
+                <a:cs typeface="Arial" pitchFamily="34" charset="-120"/>
+              </a:rPr>
+              <a:t>$1.6B–$32B</a:t>
+            </a:r>
+            <a:endParaRPr lang="en-US" sz="4000" dirty="0"/>
+          </a:p>
+        </p:txBody>
+      </p:sp>
+      <p:sp>
+        <p:nvSpPr>
+          <p:cNvPr id="7" name="Text 5"/>
+          <p:cNvSpPr txBox="1"/>
+          <p:nvPr/>
+        </p:nvSpPr>
+        <p:spPr>
+          <a:xfrm>
+            <a:off x="822960" y="3429000"/>
+            <a:ext cx="2019224" cy="548640"/>
+          </a:xfrm>
+          <a:prstGeom prst="rect">
+            <a:avLst/>
+          </a:prstGeom>
+          <a:noFill/>
+          <a:ln/>
+        </p:spPr>
+        <p:txBody>
+          <a:bodyPr wrap="square" lIns="0" tIns="0" rIns="0" bIns="0" rtlCol="0" anchor="t"/>
+          <a:lstStyle/>
+          <a:p>
+            <a:pPr indent="0" marL="0">
+              <a:buNone/>
+            </a:pPr>
+            <a:r>
+              <a:rPr lang="en-US" sz="1500" dirty="0">
+                <a:solidFill>
+                  <a:srgbClr val="CBD5E1"/>
+                </a:solidFill>
+                <a:latin typeface="Arial" pitchFamily="34" charset="0"/>
+                <a:ea typeface="Arial" pitchFamily="34" charset="-122"/>
+                <a:cs typeface="Arial" pitchFamily="34" charset="-120"/>
+              </a:rPr>
+              <a:t>2026 conversation-intelligence estimates</a:t>
+            </a:r>
+            <a:endParaRPr lang="en-US" sz="1500" dirty="0"/>
+          </a:p>
+        </p:txBody>
+      </p:sp>
+      <p:sp>
+        <p:nvSpPr>
+          <p:cNvPr id="8" name="Shape 6"/>
+          <p:cNvSpPr/>
+          <p:nvPr/>
+        </p:nvSpPr>
+        <p:spPr>
+          <a:xfrm>
+            <a:off x="3390824" y="2011680"/>
+            <a:ext cx="2567864" cy="2148840"/>
+          </a:xfrm>
+          <a:prstGeom prst="roundRect">
+            <a:avLst>
+              <a:gd name="adj" fmla="val 5957"/>
+            </a:avLst>
+          </a:prstGeom>
+          <a:solidFill>
+            <a:srgbClr val="1B2336"/>
+          </a:solidFill>
+          <a:ln w="12700">
+            <a:solidFill>
+              <a:srgbClr val="334155"/>
+            </a:solidFill>
+            <a:prstDash val="solid"/>
+          </a:ln>
+          <a:effectLst>
+            <a:outerShdw sx="100000" sy="100000" kx="0" ky="0" algn="bl" rotWithShape="0" blurRad="228600" dist="50800" dir="5400000">
+              <a:srgbClr val="000000">
+                <a:alpha val="35000"/>
+              </a:srgbClr>
+            </a:outerShdw>
+          </a:effectLst>
+        </p:spPr>
+        <p:txBody>
+          <a:bodyPr/>
+          <a:p/>
+        </p:txBody>
+      </p:sp>
+      <p:sp>
+        <p:nvSpPr>
+          <p:cNvPr id="9" name="Text 7"/>
+          <p:cNvSpPr txBox="1"/>
+          <p:nvPr/>
+        </p:nvSpPr>
+        <p:spPr>
+          <a:xfrm>
+            <a:off x="3665144" y="2331720"/>
+            <a:ext cx="2156384" cy="1005840"/>
+          </a:xfrm>
+          <a:prstGeom prst="rect">
+            <a:avLst/>
+          </a:prstGeom>
+          <a:noFill/>
+          <a:ln/>
+        </p:spPr>
+        <p:txBody>
+          <a:bodyPr wrap="square" lIns="0" tIns="0" rIns="0" bIns="0" rtlCol="0" anchor="ctr"/>
+          <a:lstStyle/>
+          <a:p>
+            <a:pPr indent="0" marL="0">
+              <a:buNone/>
+            </a:pPr>
+            <a:r>
+              <a:rPr lang="en-US" sz="2800" b="1" dirty="0">
+                <a:solidFill>
+                  <a:srgbClr val="22C55E"/>
+                </a:solidFill>
+                <a:latin typeface="Arial" pitchFamily="34" charset="0"/>
+                <a:ea typeface="Arial" pitchFamily="34" charset="-122"/>
+                <a:cs typeface="Arial" pitchFamily="34" charset="-120"/>
+              </a:rPr>
+              <a:t>1.59M</a:t>
+            </a:r>
+            <a:endParaRPr lang="en-US" sz="4000" dirty="0"/>
+          </a:p>
+        </p:txBody>
+      </p:sp>
+      <p:sp>
+        <p:nvSpPr>
+          <p:cNvPr id="10" name="Text 8"/>
+          <p:cNvSpPr txBox="1"/>
+          <p:nvPr/>
+        </p:nvSpPr>
+        <p:spPr>
+          <a:xfrm>
+            <a:off x="3665144" y="3429000"/>
+            <a:ext cx="2019224" cy="548640"/>
+          </a:xfrm>
+          <a:prstGeom prst="rect">
+            <a:avLst/>
+          </a:prstGeom>
+          <a:noFill/>
+          <a:ln/>
+        </p:spPr>
+        <p:txBody>
+          <a:bodyPr wrap="square" lIns="0" tIns="0" rIns="0" bIns="0" rtlCol="0" anchor="t"/>
+          <a:lstStyle/>
+          <a:p>
+            <a:pPr indent="0" marL="0">
+              <a:buNone/>
+            </a:pPr>
+            <a:r>
+              <a:rPr lang="en-US" sz="1500" dirty="0">
+                <a:solidFill>
+                  <a:srgbClr val="CBD5E1"/>
+                </a:solidFill>
+                <a:latin typeface="Arial" pitchFamily="34" charset="0"/>
+                <a:ea typeface="Arial" pitchFamily="34" charset="-122"/>
+                <a:cs typeface="Arial" pitchFamily="34" charset="-120"/>
+              </a:rPr>
+              <a:t>US wholesale &amp; manufacturing reps (BLS 2025)</a:t>
+            </a:r>
+            <a:endParaRPr lang="en-US" sz="1500" dirty="0"/>
+          </a:p>
+        </p:txBody>
+      </p:sp>
+      <p:sp>
+        <p:nvSpPr>
+          <p:cNvPr id="11" name="Shape 9"/>
+          <p:cNvSpPr/>
+          <p:nvPr/>
+        </p:nvSpPr>
+        <p:spPr>
+          <a:xfrm>
+            <a:off x="6233008" y="2011680"/>
+            <a:ext cx="2567864" cy="2148840"/>
+          </a:xfrm>
+          <a:prstGeom prst="roundRect">
+            <a:avLst>
+              <a:gd name="adj" fmla="val 5957"/>
+            </a:avLst>
+          </a:prstGeom>
+          <a:solidFill>
+            <a:srgbClr val="1B2336"/>
+          </a:solidFill>
+          <a:ln w="12700">
+            <a:solidFill>
+              <a:srgbClr val="334155"/>
+            </a:solidFill>
+            <a:prstDash val="solid"/>
+          </a:ln>
+          <a:effectLst>
+            <a:outerShdw sx="100000" sy="100000" kx="0" ky="0" algn="bl" rotWithShape="0" blurRad="228600" dist="50800" dir="5400000">
+              <a:srgbClr val="000000">
+                <a:alpha val="35000"/>
+              </a:srgbClr>
+            </a:outerShdw>
+          </a:effectLst>
+        </p:spPr>
+        <p:txBody>
+          <a:bodyPr/>
+          <a:p/>
+        </p:txBody>
+      </p:sp>
+      <p:sp>
+        <p:nvSpPr>
+          <p:cNvPr id="12" name="Text 10"/>
+          <p:cNvSpPr txBox="1"/>
+          <p:nvPr/>
+        </p:nvSpPr>
+        <p:spPr>
+          <a:xfrm>
+            <a:off x="6507328" y="2331720"/>
+            <a:ext cx="2156384" cy="1005840"/>
+          </a:xfrm>
+          <a:prstGeom prst="rect">
+            <a:avLst/>
+          </a:prstGeom>
+          <a:noFill/>
+          <a:ln/>
+        </p:spPr>
+        <p:txBody>
+          <a:bodyPr wrap="square" lIns="0" tIns="0" rIns="0" bIns="0" rtlCol="0" anchor="ctr"/>
+          <a:lstStyle/>
+          <a:p>
+            <a:pPr indent="0" marL="0">
+              <a:buNone/>
+            </a:pPr>
+            <a:r>
+              <a:rPr lang="en-US" sz="2800" b="1" dirty="0">
+                <a:solidFill>
+                  <a:srgbClr val="22D3EE"/>
+                </a:solidFill>
+                <a:latin typeface="Arial" pitchFamily="34" charset="0"/>
+                <a:ea typeface="Arial" pitchFamily="34" charset="-122"/>
+                <a:cs typeface="Arial" pitchFamily="34" charset="-120"/>
+              </a:rPr>
+              <a:t>$0.6B–$1.1B</a:t>
+            </a:r>
+            <a:endParaRPr lang="en-US" sz="4000" dirty="0"/>
+          </a:p>
+        </p:txBody>
+      </p:sp>
+      <p:sp>
+        <p:nvSpPr>
+          <p:cNvPr id="13" name="Text 11"/>
+          <p:cNvSpPr txBox="1"/>
+          <p:nvPr/>
+        </p:nvSpPr>
+        <p:spPr>
+          <a:xfrm>
+            <a:off x="6507328" y="3429000"/>
+            <a:ext cx="2019224" cy="548640"/>
+          </a:xfrm>
+          <a:prstGeom prst="rect">
+            <a:avLst/>
+          </a:prstGeom>
+          <a:noFill/>
+          <a:ln/>
+        </p:spPr>
+        <p:txBody>
+          <a:bodyPr wrap="square" lIns="0" tIns="0" rIns="0" bIns="0" rtlCol="0" anchor="t"/>
+          <a:lstStyle/>
+          <a:p>
+            <a:pPr indent="0" marL="0">
+              <a:buNone/>
+            </a:pPr>
+            <a:r>
+              <a:rPr lang="en-US" sz="1500" dirty="0">
+                <a:solidFill>
+                  <a:srgbClr val="CBD5E1"/>
+                </a:solidFill>
+                <a:latin typeface="Arial" pitchFamily="34" charset="0"/>
+                <a:ea typeface="Arial" pitchFamily="34" charset="-122"/>
+                <a:cs typeface="Arial" pitchFamily="34" charset="-120"/>
+              </a:rPr>
+              <a:t>those reps at a $30–60 per-seat hypothesis</a:t>
+            </a:r>
+            <a:endParaRPr lang="en-US" sz="1500" dirty="0"/>
+          </a:p>
+        </p:txBody>
+      </p:sp>
+      <p:sp>
+        <p:nvSpPr>
+          <p:cNvPr id="14" name="Shape 12"/>
+          <p:cNvSpPr/>
+          <p:nvPr/>
+        </p:nvSpPr>
+        <p:spPr>
+          <a:xfrm>
+            <a:off x="9075191" y="2011680"/>
+            <a:ext cx="2567864" cy="2148840"/>
+          </a:xfrm>
+          <a:prstGeom prst="roundRect">
+            <a:avLst>
+              <a:gd name="adj" fmla="val 5957"/>
+            </a:avLst>
+          </a:prstGeom>
+          <a:solidFill>
+            <a:srgbClr val="1B2336"/>
+          </a:solidFill>
+          <a:ln w="12700">
+            <a:solidFill>
+              <a:srgbClr val="334155"/>
+            </a:solidFill>
+            <a:prstDash val="solid"/>
+          </a:ln>
+          <a:effectLst>
+            <a:outerShdw sx="100000" sy="100000" kx="0" ky="0" algn="bl" rotWithShape="0" blurRad="228600" dist="50800" dir="5400000">
+              <a:srgbClr val="000000">
+                <a:alpha val="35000"/>
+              </a:srgbClr>
+            </a:outerShdw>
+          </a:effectLst>
+        </p:spPr>
+        <p:txBody>
+          <a:bodyPr/>
+          <a:p/>
+        </p:txBody>
+      </p:sp>
+      <p:sp>
+        <p:nvSpPr>
+          <p:cNvPr id="15" name="Text 13"/>
+          <p:cNvSpPr txBox="1"/>
+          <p:nvPr/>
+        </p:nvSpPr>
+        <p:spPr>
+          <a:xfrm>
+            <a:off x="9349511" y="2331720"/>
+            <a:ext cx="2156384" cy="1005840"/>
+          </a:xfrm>
+          <a:prstGeom prst="rect">
+            <a:avLst/>
+          </a:prstGeom>
+          <a:noFill/>
+          <a:ln/>
+        </p:spPr>
+        <p:txBody>
+          <a:bodyPr wrap="square" lIns="0" tIns="0" rIns="0" bIns="0" rtlCol="0" anchor="ctr"/>
+          <a:lstStyle/>
+          <a:p>
+            <a:pPr indent="0" marL="0">
+              <a:buNone/>
+            </a:pPr>
+            <a:r>
+              <a:rPr lang="en-US" sz="2800" b="1" dirty="0">
+                <a:solidFill>
+                  <a:srgbClr val="F8FAFC"/>
+                </a:solidFill>
+                <a:latin typeface="Arial" pitchFamily="34" charset="0"/>
+                <a:ea typeface="Arial" pitchFamily="34" charset="-122"/>
+                <a:cs typeface="Arial" pitchFamily="34" charset="-120"/>
+              </a:rPr>
+              <a:t>292k</a:t>
+            </a:r>
+            <a:endParaRPr lang="en-US" sz="4000" dirty="0"/>
+          </a:p>
+        </p:txBody>
+      </p:sp>
+      <p:sp>
+        <p:nvSpPr>
+          <p:cNvPr id="16" name="Text 14"/>
+          <p:cNvSpPr txBox="1"/>
+          <p:nvPr/>
+        </p:nvSpPr>
+        <p:spPr>
+          <a:xfrm>
+            <a:off x="9349511" y="3429000"/>
+            <a:ext cx="2019224" cy="548640"/>
+          </a:xfrm>
+          <a:prstGeom prst="rect">
+            <a:avLst/>
+          </a:prstGeom>
+          <a:noFill/>
+          <a:ln/>
+        </p:spPr>
+        <p:txBody>
+          <a:bodyPr wrap="square" lIns="0" tIns="0" rIns="0" bIns="0" rtlCol="0" anchor="t"/>
+          <a:lstStyle/>
+          <a:p>
+            <a:pPr indent="0" marL="0">
+              <a:buNone/>
+            </a:pPr>
+            <a:r>
+              <a:rPr lang="en-US" sz="1500" dirty="0">
+                <a:solidFill>
+                  <a:srgbClr val="CBD5E1"/>
+                </a:solidFill>
+                <a:latin typeface="Arial" pitchFamily="34" charset="0"/>
+                <a:ea typeface="Arial" pitchFamily="34" charset="-122"/>
+                <a:cs typeface="Arial" pitchFamily="34" charset="-120"/>
+              </a:rPr>
+              <a:t>technical &amp; scientific reps: the beachhead</a:t>
+            </a:r>
+            <a:endParaRPr lang="en-US" sz="1500" dirty="0"/>
+          </a:p>
+        </p:txBody>
+      </p:sp>
+      <p:sp>
+        <p:nvSpPr>
+          <p:cNvPr id="17" name="Shape 15"/>
+          <p:cNvSpPr/>
+          <p:nvPr/>
+        </p:nvSpPr>
+        <p:spPr>
+          <a:xfrm>
+            <a:off x="594360" y="4617720"/>
+            <a:ext cx="164592" cy="164592"/>
+          </a:xfrm>
+          <a:prstGeom prst="ellipse">
+            <a:avLst/>
+          </a:prstGeom>
+          <a:solidFill>
+            <a:srgbClr val="22C55E"/>
+          </a:solidFill>
+          <a:ln w="12700">
+            <a:solidFill>
+              <a:srgbClr val="22C55E"/>
+            </a:solidFill>
+            <a:prstDash val="solid"/>
+          </a:ln>
+        </p:spPr>
+        <p:txBody>
+          <a:bodyPr/>
+          <a:p/>
+        </p:txBody>
+      </p:sp>
+      <p:sp>
+        <p:nvSpPr>
+          <p:cNvPr id="18" name="Text 16"/>
+          <p:cNvSpPr txBox="1"/>
+          <p:nvPr/>
+        </p:nvSpPr>
+        <p:spPr>
+          <a:xfrm>
+            <a:off x="960120" y="4526280"/>
+            <a:ext cx="10682935" cy="411480"/>
+          </a:xfrm>
+          <a:prstGeom prst="rect">
+            <a:avLst/>
+          </a:prstGeom>
+          <a:noFill/>
+          <a:ln/>
+        </p:spPr>
+        <p:txBody>
+          <a:bodyPr wrap="square" lIns="0" tIns="0" rIns="0" bIns="0" rtlCol="0" anchor="t"/>
+          <a:lstStyle/>
+          <a:p>
+            <a:pPr indent="0" marL="0">
+              <a:buNone/>
+            </a:pPr>
+            <a:r>
+              <a:rPr lang="en-US" sz="1700" dirty="0">
+                <a:solidFill>
+                  <a:srgbClr val="F8FAFC"/>
+                </a:solidFill>
+                <a:latin typeface="Arial" pitchFamily="34" charset="0"/>
+                <a:ea typeface="Arial" pitchFamily="34" charset="-122"/>
+                <a:cs typeface="Arial" pitchFamily="34" charset="-120"/>
+              </a:rPr>
+              <a:t>Each firm draws the category differently — the spread is the honest number, not the top of it</a:t>
+            </a:r>
+            <a:endParaRPr lang="en-US" sz="1700" dirty="0"/>
+          </a:p>
+        </p:txBody>
+      </p:sp>
+      <p:sp>
+        <p:nvSpPr>
+          <p:cNvPr id="19" name="Shape 17"/>
+          <p:cNvSpPr/>
+          <p:nvPr/>
+        </p:nvSpPr>
+        <p:spPr>
+          <a:xfrm>
+            <a:off x="594360" y="5120640"/>
+            <a:ext cx="164592" cy="164592"/>
+          </a:xfrm>
+          <a:prstGeom prst="ellipse">
+            <a:avLst/>
+          </a:prstGeom>
+          <a:solidFill>
+            <a:srgbClr val="22D3EE"/>
+          </a:solidFill>
+          <a:ln w="12700">
+            <a:solidFill>
+              <a:srgbClr val="22D3EE"/>
+            </a:solidFill>
+            <a:prstDash val="solid"/>
+          </a:ln>
+        </p:spPr>
+        <p:txBody>
+          <a:bodyPr/>
+          <a:p/>
+        </p:txBody>
+      </p:sp>
+      <p:sp>
+        <p:nvSpPr>
+          <p:cNvPr id="20" name="Text 18"/>
+          <p:cNvSpPr txBox="1"/>
+          <p:nvPr/>
+        </p:nvSpPr>
+        <p:spPr>
+          <a:xfrm>
+            <a:off x="960120" y="5029200"/>
+            <a:ext cx="10682935" cy="411480"/>
+          </a:xfrm>
+          <a:prstGeom prst="rect">
+            <a:avLst/>
+          </a:prstGeom>
+          <a:noFill/>
+          <a:ln/>
+        </p:spPr>
+        <p:txBody>
+          <a:bodyPr wrap="square" lIns="0" tIns="0" rIns="0" bIns="0" rtlCol="0" anchor="t"/>
+          <a:lstStyle/>
+          <a:p>
+            <a:pPr indent="0" marL="0">
+              <a:buNone/>
+            </a:pPr>
+            <a:r>
+              <a:rPr lang="en-US" sz="1700" dirty="0">
+                <a:solidFill>
+                  <a:srgbClr val="F8FAFC"/>
+                </a:solidFill>
+                <a:latin typeface="Arial" pitchFamily="34" charset="0"/>
+                <a:ea typeface="Arial" pitchFamily="34" charset="-122"/>
+                <a:cs typeface="Arial" pitchFamily="34" charset="-120"/>
+              </a:rPr>
+              <a:t>Beachhead: the 292,000 technical and scientific reps, who sell the hardest contracts</a:t>
+            </a:r>
+            <a:endParaRPr lang="en-US" sz="1700" dirty="0"/>
+          </a:p>
+        </p:txBody>
+      </p:sp>
+      <p:sp>
+        <p:nvSpPr>
+          <p:cNvPr id="21" name="Shape 19"/>
+          <p:cNvSpPr/>
+          <p:nvPr/>
+        </p:nvSpPr>
+        <p:spPr>
+          <a:xfrm>
+            <a:off x="594360" y="5623560"/>
+            <a:ext cx="164592" cy="164592"/>
+          </a:xfrm>
+          <a:prstGeom prst="ellipse">
+            <a:avLst/>
+          </a:prstGeom>
+          <a:solidFill>
+            <a:srgbClr val="818CF8"/>
+          </a:solidFill>
+          <a:ln w="12700">
+            <a:solidFill>
+              <a:srgbClr val="818CF8"/>
+            </a:solidFill>
+            <a:prstDash val="solid"/>
+          </a:ln>
+        </p:spPr>
+        <p:txBody>
+          <a:bodyPr/>
+          <a:p/>
+        </p:txBody>
+      </p:sp>
+      <p:sp>
+        <p:nvSpPr>
+          <p:cNvPr id="22" name="Text 20"/>
+          <p:cNvSpPr txBox="1"/>
+          <p:nvPr/>
+        </p:nvSpPr>
+        <p:spPr>
+          <a:xfrm>
+            <a:off x="960120" y="5532120"/>
+            <a:ext cx="10682935" cy="411480"/>
+          </a:xfrm>
+          <a:prstGeom prst="rect">
+            <a:avLst/>
+          </a:prstGeom>
+          <a:noFill/>
+          <a:ln/>
+        </p:spPr>
+        <p:txBody>
+          <a:bodyPr wrap="square" lIns="0" tIns="0" rIns="0" bIns="0" rtlCol="0" anchor="t"/>
+          <a:lstStyle/>
+          <a:p>
+            <a:pPr indent="0" marL="0">
+              <a:buNone/>
+            </a:pPr>
+            <a:r>
+              <a:rPr lang="en-US" sz="1700" dirty="0">
+                <a:solidFill>
+                  <a:srgbClr val="F8FAFC"/>
+                </a:solidFill>
+                <a:latin typeface="Arial" pitchFamily="34" charset="0"/>
+                <a:ea typeface="Arial" pitchFamily="34" charset="-122"/>
+                <a:cs typeface="Arial" pitchFamily="34" charset="-120"/>
+              </a:rPr>
+              <a:t>$30–60 per seat per month is our hypothesis — no buyer has been asked to pay it yet</a:t>
+            </a:r>
+            <a:endParaRPr lang="en-US" sz="1700" dirty="0"/>
+          </a:p>
+        </p:txBody>
+      </p:sp>
+      <p:sp>
+        <p:nvSpPr>
+          <p:cNvPr id="23" name="Text 21"/>
+          <p:cNvSpPr txBox="1"/>
+          <p:nvPr/>
+        </p:nvSpPr>
+        <p:spPr>
+          <a:xfrm>
+            <a:off x="548640" y="6172200"/>
+            <a:ext cx="11094415" cy="320040"/>
+          </a:xfrm>
+          <a:prstGeom prst="rect">
+            <a:avLst/>
+          </a:prstGeom>
+          <a:noFill/>
+          <a:ln/>
+        </p:spPr>
+        <p:txBody>
+          <a:bodyPr wrap="square" lIns="0" tIns="0" rIns="0" bIns="0" rtlCol="0" anchor="t"/>
+          <a:lstStyle/>
+          <a:p>
+            <a:pPr indent="0" marL="0">
+              <a:buNone/>
+            </a:pPr>
+            <a:r>
+              <a:rPr lang="en-US" sz="1200" dirty="0">
+                <a:solidFill>
+                  <a:srgbClr val="94A3B8"/>
+                </a:solidFill>
+                <a:latin typeface="Arial" pitchFamily="34" charset="0"/>
+                <a:ea typeface="Arial" pitchFamily="34" charset="-122"/>
+                <a:cs typeface="Arial" pitchFamily="34" charset="-120"/>
+              </a:rPr>
+              <a:t>1.59M = 1.3M except-technical-and-scientific + 292k technical and scientific, BLS Occupational Outlook Handbook 2025 employment (bls.gov/ooh). $0.6B–$1.1B = 1.59M × $30–60 × 12.</a:t>
+            </a:r>
+            <a:endParaRPr lang="en-US" sz="1200" dirty="0"/>
+          </a:p>
+        </p:txBody>
+      </p:sp>
+    </p:spTree>
+  </p:cSld>
+  <p:clrMapOvr>
+    <a:masterClrMapping/>
+  </p:clrMapOvr>
+</p:sld>
+</file>
+
+<file path=ppt/slides/slide11.xml><?xml version="1.0" encoding="utf-8"?>
 <p:sld xmlns:a="http://schemas.openxmlformats.org/drawingml/2006/main" xmlns:r="http://schemas.openxmlformats.org/officeDocument/2006/relationships" xmlns:p="http://schemas.openxmlformats.org/presentationml/2006/main">
   <p:cSld name="Slide 10">
     <p:bg>
@@ -2164,7 +3014,7 @@
                 <a:ea typeface="Consolas" pitchFamily="34" charset="-122"/>
                 <a:cs typeface="Consolas" pitchFamily="34" charset="-120"/>
               </a:rPr>
-              <a:t>10 / 10</a:t>
+              <a:t>11 / 11</a:t>
             </a:r>
             <a:endParaRPr lang="en-US" sz="1100" dirty="0"/>
           </a:p>
@@ -2590,7 +3440,7 @@
                 <a:ea typeface="Arial" pitchFamily="34" charset="-122"/>
                 <a:cs typeface="Arial" pitchFamily="34" charset="-120"/>
               </a:rPr>
-              <a:t>Browser-mic path, hardened end to end</a:t>
+              <a:t>Physical-mic hardware (browser path verified 17/17)</a:t>
             </a:r>
             <a:endParaRPr lang="en-US" sz="1800" dirty="0"/>
           </a:p>
@@ -2931,7 +3781,7 @@
                 <a:ea typeface="Consolas" pitchFamily="34" charset="-122"/>
                 <a:cs typeface="Consolas" pitchFamily="34" charset="-120"/>
               </a:rPr>
-              <a:t>02 / 10</a:t>
+              <a:t>02 / 11</a:t>
             </a:r>
             <a:endParaRPr lang="en-US" sz="1100" dirty="0"/>
           </a:p>
@@ -3636,7 +4486,7 @@
                 <a:ea typeface="Consolas" pitchFamily="34" charset="-122"/>
                 <a:cs typeface="Consolas" pitchFamily="34" charset="-120"/>
               </a:rPr>
-              <a:t>03 / 10</a:t>
+              <a:t>03 / 11</a:t>
             </a:r>
             <a:endParaRPr lang="en-US" sz="1100" dirty="0"/>
           </a:p>
@@ -4454,7 +5304,7 @@
                 <a:ea typeface="Consolas" pitchFamily="34" charset="-122"/>
                 <a:cs typeface="Consolas" pitchFamily="34" charset="-120"/>
               </a:rPr>
-              <a:t>04 / 10</a:t>
+              <a:t>04 / 11</a:t>
             </a:r>
             <a:endParaRPr lang="en-US" sz="1100" dirty="0"/>
           </a:p>
@@ -4980,7 +5830,7 @@
                 <a:ea typeface="Consolas" pitchFamily="34" charset="-122"/>
                 <a:cs typeface="Consolas" pitchFamily="34" charset="-120"/>
               </a:rPr>
-              <a:t>05 / 10</a:t>
+              <a:t>05 / 11</a:t>
             </a:r>
             <a:endParaRPr lang="en-US" sz="1100" dirty="0"/>
           </a:p>
@@ -5658,7 +6508,7 @@
                 <a:ea typeface="Consolas" pitchFamily="34" charset="-122"/>
                 <a:cs typeface="Consolas" pitchFamily="34" charset="-120"/>
               </a:rPr>
-              <a:t>06 / 10</a:t>
+              <a:t>06 / 11</a:t>
             </a:r>
             <a:endParaRPr lang="en-US" sz="1100" dirty="0"/>
           </a:p>
@@ -6814,7 +7664,7 @@
                 <a:ea typeface="Consolas" pitchFamily="34" charset="-122"/>
                 <a:cs typeface="Consolas" pitchFamily="34" charset="-120"/>
               </a:rPr>
-              <a:t>07 / 10</a:t>
+              <a:t>07 / 11</a:t>
             </a:r>
             <a:endParaRPr lang="en-US" sz="1100" dirty="0"/>
           </a:p>
@@ -7513,7 +8363,7 @@
                 <a:ea typeface="Consolas" pitchFamily="34" charset="-122"/>
                 <a:cs typeface="Consolas" pitchFamily="34" charset="-120"/>
               </a:rPr>
-              <a:t>08 / 10</a:t>
+              <a:t>08 / 11</a:t>
             </a:r>
             <a:endParaRPr lang="en-US" sz="1100" dirty="0"/>
           </a:p>
@@ -7739,7 +8589,7 @@
                 <a:ea typeface="Arial" pitchFamily="34" charset="-122"/>
                 <a:cs typeface="Arial" pitchFamily="34" charset="-120"/>
               </a:rPr>
-              <a:t>Everything spoken or shown comes from the uploaded contract. The LLM only picks which clause applies.</a:t>
+              <a:t>The words are the contract's own. Gemini picks the clause ID; the Voice Agent is told to say it verbatim.</a:t>
             </a:r>
             <a:endParaRPr lang="en-US" sz="1600" dirty="0"/>
           </a:p>
@@ -8152,7 +9002,7 @@
                 <a:ea typeface="Arial" pitchFamily="34" charset="-122"/>
                 <a:cs typeface="Arial" pitchFamily="34" charset="-120"/>
               </a:rPr>
-              <a:t>A false accusation is worse than a missed one.</a:t>
+              <a:t>A false accusation is worse than a missed one. The read-back is graded against the clause after it is spoken: drift is flagged, not blocked.</a:t>
             </a:r>
             <a:endParaRPr lang="en-US" sz="1800" dirty="0"/>
           </a:p>
@@ -8262,7 +9112,7 @@
                 <a:ea typeface="Consolas" pitchFamily="34" charset="-122"/>
                 <a:cs typeface="Consolas" pitchFamily="34" charset="-120"/>
               </a:rPr>
-              <a:t>09 / 10</a:t>
+              <a:t>09 / 11</a:t>
             </a:r>
             <a:endParaRPr lang="en-US" sz="1100" dirty="0"/>
           </a:p>
@@ -8901,7 +9751,7 @@
                 <a:ea typeface="Arial" pitchFamily="34" charset="-122"/>
                 <a:cs typeface="Arial" pitchFamily="34" charset="-120"/>
               </a:rPr>
-              <a:t>A monitor's spoken question about §4.2 answered correctly by voice</a:t>
+              <a:t>A monitor's clause request for §4.2, picked from the rail, answered by voice</a:t>
             </a:r>
             <a:endParaRPr lang="en-US" sz="1700" dirty="0"/>
           </a:p>
@@ -8969,7 +9819,7 @@
                 <a:ea typeface="Arial" pitchFamily="34" charset="-122"/>
                 <a:cs typeface="Arial" pitchFamily="34" charset="-120"/>
               </a:rPr>
-              <a:t>151 server tests passing</a:t>
+              <a:t>14/14 contradictions caught, 0 false alarms; 151 server tests passing</a:t>
             </a:r>
             <a:endParaRPr lang="en-US" sz="1700" dirty="0"/>
           </a:p>

--- a/docs/submission/ClauseCatcher.pptx
+++ b/docs/submission/ClauseCatcher.pptx
@@ -3508,7 +3508,7 @@
                 <a:ea typeface="Arial" pitchFamily="34" charset="-122"/>
                 <a:cs typeface="Arial" pitchFamily="34" charset="-120"/>
               </a:rPr>
-              <a:t>A hosted, deployed instance</a:t>
+              <a:t>CRM and meeting-platform audio</a:t>
             </a:r>
             <a:endParaRPr lang="en-US" sz="1800" dirty="0"/>
           </a:p>
